--- a/courses/learn_legalization/module03-03-displacement-hpwl/slides.pptx
+++ b/courses/learn_legalization/module03-03-displacement-hpwl/slides.pptx
@@ -16,6 +16,9 @@
     <p:sldId id="264" r:id="rId16"/>
     <p:sldId id="265" r:id="rId17"/>
     <p:sldId id="266" r:id="rId18"/>
+    <p:sldId id="267" r:id="rId19"/>
+    <p:sldId id="268" r:id="rId20"/>
+    <p:sldId id="269" r:id="rId21"/>
   </p:sldIdLst>
   <p:sldSz cx="12191695" cy="6858000" type="screen4x3"/>
   <p:notesSz cx="6858000" cy="9144000"/>
@@ -582,7 +585,7 @@
           <a:lstStyle/>
           <a:p>
             <a:r>
-              <a:t>Common traps: assuming snap alone legalizes; forgetting site width when checking overlap; ignoring fixed macro D at (8, 4); reporting HPWL without legality; and comparing Abacus and Tetris without naming displacement versus wirelength tradeoffs.</a:t>
+              <a:t>In the browser lab track, open the **displacement-hpwl** lab from the tools shelf. Open the interactive lab, place or snap cells on the site and row grid—or use an Apply helper—then Check. Reveal golden is study-only. Work the challenges that lock the goldens, then come back to implement the same loop yourself.</a:t>
             </a:r>
           </a:p>
         </p:txBody>
@@ -652,6 +655,146 @@
           <a:lstStyle/>
           <a:p>
             <a:r>
+              <a:t>In the implement track, open this module's EXAMPLES.md Pseudocode section and the course common solvers. Parse `tiny_legal.json`, run the algorithm with deterministic coordinates, and print legality, displacement, and HPWL. Match the browser goldens before you claim the checklist.</a:t>
+            </a:r>
+          </a:p>
+        </p:txBody>
+      </p:sp>
+      <p:sp>
+        <p:nvSpPr>
+          <p:cNvPr id="4" name="Slide Number Placeholder 3"/>
+          <p:cNvSpPr>
+            <a:spLocks noGrp="1"/>
+          </p:cNvSpPr>
+          <p:nvPr>
+            <p:ph type="sldNum" idx="5" sz="quarter"/>
+          </p:nvPr>
+        </p:nvSpPr>
+        <p:spPr/>
+      </p:sp>
+    </p:spTree>
+  </p:cSld>
+  <p:clrMapOvr>
+    <a:masterClrMapping/>
+  </p:clrMapOvr>
+</p:notes>
+</file>
+
+<file path=ppt/notesSlides/notesSlide12.xml><?xml version="1.0" encoding="utf-8"?>
+<p:notes xmlns:a="http://schemas.openxmlformats.org/drawingml/2006/main" xmlns:p="http://schemas.openxmlformats.org/presentationml/2006/main" xmlns:r="http://schemas.openxmlformats.org/officeDocument/2006/relationships">
+  <p:cSld>
+    <p:spTree>
+      <p:nvGrpSpPr>
+        <p:cNvPr id="1" name=""/>
+        <p:cNvGrpSpPr/>
+        <p:nvPr/>
+      </p:nvGrpSpPr>
+      <p:grpSpPr>
+        <a:xfrm>
+          <a:off x="0" y="0"/>
+          <a:ext cx="0" cy="0"/>
+          <a:chOff x="0" y="0"/>
+          <a:chExt cx="0" cy="0"/>
+        </a:xfrm>
+      </p:grpSpPr>
+      <p:sp>
+        <p:nvSpPr>
+          <p:cNvPr id="2" name="Slide Image Placeholder 1"/>
+          <p:cNvSpPr>
+            <a:spLocks noGrp="1"/>
+          </p:cNvSpPr>
+          <p:nvPr>
+            <p:ph type="sldImg" idx="2"/>
+          </p:nvPr>
+        </p:nvSpPr>
+        <p:spPr/>
+      </p:sp>
+      <p:sp>
+        <p:nvSpPr>
+          <p:cNvPr id="3" name="Notes Placeholder 2"/>
+          <p:cNvSpPr>
+            <a:spLocks noGrp="1"/>
+          </p:cNvSpPr>
+          <p:nvPr>
+            <p:ph type="body" idx="3" sz="quarter"/>
+          </p:nvPr>
+        </p:nvSpPr>
+        <p:spPr/>
+        <p:txBody>
+          <a:bodyPr/>
+          <a:lstStyle/>
+          <a:p>
+            <a:r>
+              <a:t>Common traps: assuming snap alone legalizes; forgetting site width when checking overlap; ignoring fixed macro D at (8, 4); reporting HPWL without legality; and comparing Abacus and Tetris without naming displacement versus wirelength tradeoffs.</a:t>
+            </a:r>
+          </a:p>
+        </p:txBody>
+      </p:sp>
+      <p:sp>
+        <p:nvSpPr>
+          <p:cNvPr id="4" name="Slide Number Placeholder 3"/>
+          <p:cNvSpPr>
+            <a:spLocks noGrp="1"/>
+          </p:cNvSpPr>
+          <p:nvPr>
+            <p:ph type="sldNum" idx="5" sz="quarter"/>
+          </p:nvPr>
+        </p:nvSpPr>
+        <p:spPr/>
+      </p:sp>
+    </p:spTree>
+  </p:cSld>
+  <p:clrMapOvr>
+    <a:masterClrMapping/>
+  </p:clrMapOvr>
+</p:notes>
+</file>
+
+<file path=ppt/notesSlides/notesSlide13.xml><?xml version="1.0" encoding="utf-8"?>
+<p:notes xmlns:a="http://schemas.openxmlformats.org/drawingml/2006/main" xmlns:p="http://schemas.openxmlformats.org/presentationml/2006/main" xmlns:r="http://schemas.openxmlformats.org/officeDocument/2006/relationships">
+  <p:cSld>
+    <p:spTree>
+      <p:nvGrpSpPr>
+        <p:cNvPr id="1" name=""/>
+        <p:cNvGrpSpPr/>
+        <p:nvPr/>
+      </p:nvGrpSpPr>
+      <p:grpSpPr>
+        <a:xfrm>
+          <a:off x="0" y="0"/>
+          <a:ext cx="0" cy="0"/>
+          <a:chOff x="0" y="0"/>
+          <a:chExt cx="0" cy="0"/>
+        </a:xfrm>
+      </p:grpSpPr>
+      <p:sp>
+        <p:nvSpPr>
+          <p:cNvPr id="2" name="Slide Image Placeholder 1"/>
+          <p:cNvSpPr>
+            <a:spLocks noGrp="1"/>
+          </p:cNvSpPr>
+          <p:nvPr>
+            <p:ph type="sldImg" idx="2"/>
+          </p:nvPr>
+        </p:nvSpPr>
+        <p:spPr/>
+      </p:sp>
+      <p:sp>
+        <p:nvSpPr>
+          <p:cNvPr id="3" name="Notes Placeholder 2"/>
+          <p:cNvSpPr>
+            <a:spLocks noGrp="1"/>
+          </p:cNvSpPr>
+          <p:nvPr>
+            <p:ph type="body" idx="3" sz="quarter"/>
+          </p:nvPr>
+        </p:nvSpPr>
+        <p:spPr/>
+        <p:txBody>
+          <a:bodyPr/>
+          <a:lstStyle/>
+          <a:p>
+            <a:r>
               <a:t>Complete the checklist for at least one track—preferably both. Implement until your metrics match the starter goldens. When you're ready, take the short quiz, then continue to the next module.</a:t>
             </a:r>
           </a:p>
@@ -725,12 +868,6 @@
               <a:t>Lambda one gives cost forty-two; lambda five gives cost fifty-eight on the same legal Abacus result. Higher lambda favors staying near global placement even when wirelength could be slightly better under a different packer.</a:t>
             </a:r>
           </a:p>
-          <a:p/>
-          <a:p>
-            <a:r>
-              <a:t>&lt;!-- algorithm-walkthrough --&gt;</a:t>
-            </a:r>
-          </a:p>
         </p:txBody>
       </p:sp>
       <p:sp>
@@ -798,7 +935,13 @@
           <a:lstStyle/>
           <a:p>
             <a:r>
-              <a:t>Legalization objectives often combine wirelength with a displacement penalty from the pre-legalize layout. Lambda controls how hard you resist moving cells away from global placement.</a:t>
+              <a:t>This module’s pseudocode is a cost function, not a packer. After you have a legal layout, compute displacement and HPWL, then combine them with lambda.</a:t>
+            </a:r>
+          </a:p>
+          <a:p/>
+          <a:p>
+            <a:r>
+              <a:t>Open this module's examples file and find the Pseudocode section. That written sketch is what you implement on the implement track and what the browser challenges measure.</a:t>
             </a:r>
           </a:p>
         </p:txBody>
@@ -868,7 +1011,7 @@
           <a:lstStyle/>
           <a:p>
             <a:r>
-              <a:t>Abacus on the overlap seed yields HPWL thirty-eight and displacement four versus the illegal starter. That is the Pareto point with lower movement.</a:t>
+              <a:t>Plug in the Abacus goldens: thirty-eight plus lambda times four. Lambda one costs forty-two; lambda five costs fifty-eight. Higher lambda means the sketch favors staying near the global place.</a:t>
             </a:r>
           </a:p>
         </p:txBody>
@@ -938,7 +1081,7 @@
           <a:lstStyle/>
           <a:p>
             <a:r>
-              <a:t>With lambda one, cost equals thirty-eight plus four equals forty-two. Displacement is cheap—one HPWL point buys one unit of movement in the objective.</a:t>
+              <a:t>Legalization objectives often combine wirelength with a displacement penalty from the pre-legalize layout. Lambda controls how hard you resist moving cells away from global placement.</a:t>
             </a:r>
           </a:p>
         </p:txBody>
@@ -1008,7 +1151,7 @@
           <a:lstStyle/>
           <a:p>
             <a:r>
-              <a:t>Raise lambda to five: cost becomes thirty-eight plus five times four equals fifty-eight. The same legal layout looks expensive when you punish displacement heavily.</a:t>
+              <a:t>Abacus on the overlap seed yields HPWL thirty-eight and displacement four versus the illegal starter. That is the Pareto point with lower movement.</a:t>
             </a:r>
           </a:p>
         </p:txBody>
@@ -1078,13 +1221,7 @@
           <a:lstStyle/>
           <a:p>
             <a:r>
-              <a:t>When lambda is large, algorithms that minimize displacement—Abacus over Tetris—win the combined cost even if HPWL is slightly worse. Quote λ whenever you compare legalizers.</a:t>
-            </a:r>
-          </a:p>
-          <a:p/>
-          <a:p>
-            <a:r>
-              <a:t>&lt;!-- /algorithm-walkthrough --&gt;</a:t>
+              <a:t>With lambda one, cost equals thirty-eight plus four equals forty-two. Displacement is cheap—one HPWL point buys one unit of movement in the objective.</a:t>
             </a:r>
           </a:p>
         </p:txBody>
@@ -1154,7 +1291,7 @@
           <a:lstStyle/>
           <a:p>
             <a:r>
-              <a:t>In the browser lab track, open the **displacement-hpwl** lab from the tools shelf. Load the overlap or float starter, run the legalizer once, and read legality plus displacement and HPWL when the panel shows them. Work the challenges that lock the goldens, then come back to implement the same loop yourself.</a:t>
+              <a:t>Raise lambda to five: cost becomes thirty-eight plus five times four equals fifty-eight. The same legal layout looks expensive when you punish displacement heavily.</a:t>
             </a:r>
           </a:p>
         </p:txBody>
@@ -1224,7 +1361,7 @@
           <a:lstStyle/>
           <a:p>
             <a:r>
-              <a:t>In the implement track, open this module's examples and the course `common/` solvers. Parse `tiny_legal.json`, run the algorithm with deterministic coordinates, and print legality, displacement, and HPWL. Match the browser goldens before you claim the checklist.</a:t>
+              <a:t>When lambda is large, algorithms that minimize displacement—Abacus over Tetris—win the combined cost even if HPWL is slightly worse. Quote λ whenever you compare legalizers.</a:t>
             </a:r>
           </a:p>
         </p:txBody>
@@ -4382,21 +4519,45 @@
                 </a:solidFill>
                 <a:latin typeface="Calibri"/>
               </a:rPr>
-              <a:t>Pitfalls</a:t>
-            </a:r>
-          </a:p>
-        </p:txBody>
-      </p:sp>
-      <p:sp>
-        <p:nvSpPr>
-          <p:cNvPr id="3" name="TextBox 2"/>
+              <a:t>Higher λ favors staying put</a:t>
+            </a:r>
+          </a:p>
+        </p:txBody>
+      </p:sp>
+      <p:pic>
+        <p:nvPicPr>
+          <p:cNvPr id="3" name="Picture 2" descr="05-lambda-tradeoff.png"/>
+          <p:cNvPicPr>
+            <a:picLocks noChangeAspect="1"/>
+          </p:cNvPicPr>
+          <p:nvPr/>
+        </p:nvPicPr>
+        <p:blipFill>
+          <a:blip r:embed="rId2"/>
+          <a:stretch>
+            <a:fillRect/>
+          </a:stretch>
+        </p:blipFill>
+        <p:spPr>
+          <a:xfrm>
+            <a:off x="548640" y="1143000"/>
+            <a:ext cx="9222489" cy="4572000"/>
+          </a:xfrm>
+          <a:prstGeom prst="rect">
+            <a:avLst/>
+          </a:prstGeom>
+        </p:spPr>
+      </p:pic>
+      <p:sp>
+        <p:nvSpPr>
+          <p:cNvPr id="4" name="TextBox 3"/>
           <p:cNvSpPr txBox="1"/>
           <p:nvPr/>
         </p:nvSpPr>
         <p:spPr>
           <a:xfrm>
-            <a:off x="548640" y="1234440"/>
-            <a:ext cx="11064240" cy="4937760"/>
+            <a:off x="548640" y="5897880"/>
+            <a:ext cx="11064240" cy="411480"/>
           </a:xfrm>
           <a:prstGeom prst="rect">
             <a:avLst/>
@@ -4409,32 +4570,26 @@
           </a:bodyPr>
           <a:lstStyle/>
           <a:p>
-            <a:pPr lvl="0" marL="457200" indent="-228600">
-              <a:buFont typeface="Calibri"/>
-              <a:spcAft>
-                <a:spcPts val="1000"/>
-              </a:spcAft>
-              <a:buSzPct val="100000"/>
-              <a:buChar char="•"/>
+            <a:pPr>
               <a:lnSpc>
                 <a:spcPts val="2200"/>
               </a:lnSpc>
             </a:pPr>
             <a:r>
-              <a:rPr sz="2000" b="0">
+              <a:rPr sz="1200" b="0">
                 <a:solidFill>
                   <a:srgbClr val="333333"/>
                 </a:solidFill>
                 <a:latin typeface="Calibri"/>
               </a:rPr>
-              <a:t>Common traps</a:t>
-            </a:r>
-          </a:p>
-        </p:txBody>
-      </p:sp>
-      <p:sp>
-        <p:nvSpPr>
-          <p:cNvPr id="4" name="TextBox 3"/>
+              <a:t>Higher λ favors staying put</a:t>
+            </a:r>
+          </a:p>
+        </p:txBody>
+      </p:sp>
+      <p:sp>
+        <p:nvSpPr>
+          <p:cNvPr id="5" name="TextBox 4"/>
           <p:cNvSpPr txBox="1"/>
           <p:nvPr/>
         </p:nvSpPr>
@@ -4523,6 +4678,557 @@
                 </a:solidFill>
                 <a:latin typeface="Calibri"/>
               </a:rPr>
+              <a:t>Browser lab track</a:t>
+            </a:r>
+          </a:p>
+        </p:txBody>
+      </p:sp>
+      <p:sp>
+        <p:nvSpPr>
+          <p:cNvPr id="3" name="TextBox 2"/>
+          <p:cNvSpPr txBox="1"/>
+          <p:nvPr/>
+        </p:nvSpPr>
+        <p:spPr>
+          <a:xfrm>
+            <a:off x="548640" y="1234440"/>
+            <a:ext cx="11064240" cy="4937760"/>
+          </a:xfrm>
+          <a:prstGeom prst="rect">
+            <a:avLst/>
+          </a:prstGeom>
+          <a:noFill/>
+        </p:spPr>
+        <p:txBody>
+          <a:bodyPr wrap="square">
+            <a:noAutofit/>
+          </a:bodyPr>
+          <a:lstStyle/>
+          <a:p>
+            <a:pPr lvl="0" marL="457200" indent="-228600">
+              <a:buFont typeface="Calibri"/>
+              <a:spcAft>
+                <a:spcPts val="1000"/>
+              </a:spcAft>
+              <a:buSzPct val="100000"/>
+              <a:buChar char="•"/>
+              <a:lnSpc>
+                <a:spcPts val="2200"/>
+              </a:lnSpc>
+            </a:pPr>
+            <a:r>
+              <a:rPr sz="2000" b="0">
+                <a:solidFill>
+                  <a:srgbClr val="333333"/>
+                </a:solidFill>
+                <a:latin typeface="Calibri"/>
+              </a:rPr>
+              <a:t>In the browser lab track, open the </a:t>
+            </a:r>
+            <a:r>
+              <a:rPr sz="2000" b="1">
+                <a:solidFill>
+                  <a:srgbClr val="333333"/>
+                </a:solidFill>
+                <a:latin typeface="Calibri"/>
+              </a:rPr>
+              <a:t>displacement-hpwl</a:t>
+            </a:r>
+            <a:r>
+              <a:rPr sz="2000" b="0">
+                <a:solidFill>
+                  <a:srgbClr val="333333"/>
+                </a:solidFill>
+                <a:latin typeface="Calibri"/>
+              </a:rPr>
+              <a:t> lab from the tools shelf</a:t>
+            </a:r>
+          </a:p>
+          <a:p>
+            <a:pPr lvl="0" marL="457200" indent="-228600">
+              <a:buFont typeface="Calibri"/>
+              <a:spcAft>
+                <a:spcPts val="1000"/>
+              </a:spcAft>
+              <a:buSzPct val="100000"/>
+              <a:buChar char="•"/>
+              <a:lnSpc>
+                <a:spcPts val="2200"/>
+              </a:lnSpc>
+            </a:pPr>
+            <a:r>
+              <a:rPr sz="2000" b="0">
+                <a:solidFill>
+                  <a:srgbClr val="333333"/>
+                </a:solidFill>
+                <a:latin typeface="Calibri"/>
+              </a:rPr>
+              <a:t>Open the interactive lab</a:t>
+            </a:r>
+          </a:p>
+          <a:p>
+            <a:pPr lvl="0" marL="457200" indent="-228600">
+              <a:buFont typeface="Calibri"/>
+              <a:spcAft>
+                <a:spcPts val="1000"/>
+              </a:spcAft>
+              <a:buSzPct val="100000"/>
+              <a:buChar char="•"/>
+              <a:lnSpc>
+                <a:spcPts val="2200"/>
+              </a:lnSpc>
+            </a:pPr>
+            <a:r>
+              <a:rPr sz="2000" b="0">
+                <a:solidFill>
+                  <a:srgbClr val="333333"/>
+                </a:solidFill>
+                <a:latin typeface="Calibri"/>
+              </a:rPr>
+              <a:t>Reveal golden is study-only</a:t>
+            </a:r>
+          </a:p>
+          <a:p>
+            <a:pPr lvl="0" marL="457200" indent="-228600">
+              <a:buFont typeface="Calibri"/>
+              <a:spcAft>
+                <a:spcPts val="1000"/>
+              </a:spcAft>
+              <a:buSzPct val="100000"/>
+              <a:buChar char="•"/>
+              <a:lnSpc>
+                <a:spcPts val="2200"/>
+              </a:lnSpc>
+            </a:pPr>
+            <a:r>
+              <a:rPr sz="2000" b="0">
+                <a:solidFill>
+                  <a:srgbClr val="333333"/>
+                </a:solidFill>
+                <a:latin typeface="Calibri"/>
+              </a:rPr>
+              <a:t>Work the challenges that lock the goldens</a:t>
+            </a:r>
+          </a:p>
+        </p:txBody>
+      </p:sp>
+      <p:sp>
+        <p:nvSpPr>
+          <p:cNvPr id="4" name="TextBox 3"/>
+          <p:cNvSpPr txBox="1"/>
+          <p:nvPr/>
+        </p:nvSpPr>
+        <p:spPr>
+          <a:xfrm>
+            <a:off x="548640" y="6355080"/>
+            <a:ext cx="11064240" cy="320040"/>
+          </a:xfrm>
+          <a:prstGeom prst="rect">
+            <a:avLst/>
+          </a:prstGeom>
+          <a:noFill/>
+        </p:spPr>
+        <p:txBody>
+          <a:bodyPr wrap="square">
+            <a:noAutofit/>
+          </a:bodyPr>
+          <a:lstStyle/>
+          <a:p>
+            <a:pPr algn="r">
+              <a:lnSpc>
+                <a:spcPts val="2200"/>
+              </a:lnSpc>
+              <a:defRPr sz="1000" b="0">
+                <a:solidFill>
+                  <a:srgbClr val="666666"/>
+                </a:solidFill>
+                <a:latin typeface="Calibri"/>
+              </a:defRPr>
+            </a:pPr>
+            <a:r>
+              <a:t>learn_legalization — 03 displacement hpwl</a:t>
+            </a:r>
+          </a:p>
+        </p:txBody>
+      </p:sp>
+    </p:spTree>
+  </p:cSld>
+  <p:clrMapOvr>
+    <a:masterClrMapping/>
+  </p:clrMapOvr>
+</p:sld>
+</file>
+
+<file path=ppt/slides/slide12.xml><?xml version="1.0" encoding="utf-8"?>
+<p:sld xmlns:a="http://schemas.openxmlformats.org/drawingml/2006/main" xmlns:p="http://schemas.openxmlformats.org/presentationml/2006/main" xmlns:r="http://schemas.openxmlformats.org/officeDocument/2006/relationships">
+  <p:cSld>
+    <p:spTree>
+      <p:nvGrpSpPr>
+        <p:cNvPr id="1" name=""/>
+        <p:cNvGrpSpPr/>
+        <p:nvPr/>
+      </p:nvGrpSpPr>
+      <p:grpSpPr/>
+      <p:sp>
+        <p:nvSpPr>
+          <p:cNvPr id="2" name="TextBox 1"/>
+          <p:cNvSpPr txBox="1"/>
+          <p:nvPr/>
+        </p:nvSpPr>
+        <p:spPr>
+          <a:xfrm>
+            <a:off x="548640" y="411480"/>
+            <a:ext cx="11064240" cy="777240"/>
+          </a:xfrm>
+          <a:prstGeom prst="rect">
+            <a:avLst/>
+          </a:prstGeom>
+          <a:noFill/>
+        </p:spPr>
+        <p:txBody>
+          <a:bodyPr wrap="square">
+            <a:noAutofit/>
+          </a:bodyPr>
+          <a:lstStyle/>
+          <a:p>
+            <a:pPr>
+              <a:lnSpc>
+                <a:spcPts val="2200"/>
+              </a:lnSpc>
+            </a:pPr>
+            <a:r>
+              <a:rPr sz="2800" b="1">
+                <a:solidFill>
+                  <a:srgbClr val="1A1A2E"/>
+                </a:solidFill>
+                <a:latin typeface="Calibri"/>
+              </a:rPr>
+              <a:t>Implement track</a:t>
+            </a:r>
+          </a:p>
+        </p:txBody>
+      </p:sp>
+      <p:sp>
+        <p:nvSpPr>
+          <p:cNvPr id="3" name="TextBox 2"/>
+          <p:cNvSpPr txBox="1"/>
+          <p:nvPr/>
+        </p:nvSpPr>
+        <p:spPr>
+          <a:xfrm>
+            <a:off x="548640" y="1234440"/>
+            <a:ext cx="11064240" cy="4937760"/>
+          </a:xfrm>
+          <a:prstGeom prst="rect">
+            <a:avLst/>
+          </a:prstGeom>
+          <a:noFill/>
+        </p:spPr>
+        <p:txBody>
+          <a:bodyPr wrap="square">
+            <a:noAutofit/>
+          </a:bodyPr>
+          <a:lstStyle/>
+          <a:p>
+            <a:pPr lvl="0" marL="457200" indent="-228600">
+              <a:buFont typeface="Calibri"/>
+              <a:spcAft>
+                <a:spcPts val="1000"/>
+              </a:spcAft>
+              <a:buSzPct val="100000"/>
+              <a:buChar char="•"/>
+              <a:lnSpc>
+                <a:spcPts val="2200"/>
+              </a:lnSpc>
+            </a:pPr>
+            <a:r>
+              <a:rPr sz="2000" b="0">
+                <a:solidFill>
+                  <a:srgbClr val="333333"/>
+                </a:solidFill>
+                <a:latin typeface="Calibri"/>
+              </a:rPr>
+              <a:t>In the implement track</a:t>
+            </a:r>
+          </a:p>
+          <a:p>
+            <a:pPr lvl="0" marL="457200" indent="-228600">
+              <a:buFont typeface="Calibri"/>
+              <a:spcAft>
+                <a:spcPts val="1000"/>
+              </a:spcAft>
+              <a:buSzPct val="100000"/>
+              <a:buChar char="•"/>
+              <a:lnSpc>
+                <a:spcPts val="2200"/>
+              </a:lnSpc>
+            </a:pPr>
+            <a:r>
+              <a:rPr sz="2000" b="0">
+                <a:solidFill>
+                  <a:srgbClr val="333333"/>
+                </a:solidFill>
+                <a:latin typeface="Calibri"/>
+              </a:rPr>
+              <a:t>Parse `tiny_legal.json`, run the algorithm with deterministic coordinates</a:t>
+            </a:r>
+          </a:p>
+          <a:p>
+            <a:pPr lvl="0" marL="457200" indent="-228600">
+              <a:buFont typeface="Calibri"/>
+              <a:spcAft>
+                <a:spcPts val="1000"/>
+              </a:spcAft>
+              <a:buSzPct val="100000"/>
+              <a:buChar char="•"/>
+              <a:lnSpc>
+                <a:spcPts val="2200"/>
+              </a:lnSpc>
+            </a:pPr>
+            <a:r>
+              <a:rPr sz="2000" b="0">
+                <a:solidFill>
+                  <a:srgbClr val="333333"/>
+                </a:solidFill>
+                <a:latin typeface="Calibri"/>
+              </a:rPr>
+              <a:t>Match the browser goldens before you claim the checklist</a:t>
+            </a:r>
+          </a:p>
+        </p:txBody>
+      </p:sp>
+      <p:sp>
+        <p:nvSpPr>
+          <p:cNvPr id="4" name="TextBox 3"/>
+          <p:cNvSpPr txBox="1"/>
+          <p:nvPr/>
+        </p:nvSpPr>
+        <p:spPr>
+          <a:xfrm>
+            <a:off x="548640" y="6355080"/>
+            <a:ext cx="11064240" cy="320040"/>
+          </a:xfrm>
+          <a:prstGeom prst="rect">
+            <a:avLst/>
+          </a:prstGeom>
+          <a:noFill/>
+        </p:spPr>
+        <p:txBody>
+          <a:bodyPr wrap="square">
+            <a:noAutofit/>
+          </a:bodyPr>
+          <a:lstStyle/>
+          <a:p>
+            <a:pPr algn="r">
+              <a:lnSpc>
+                <a:spcPts val="2200"/>
+              </a:lnSpc>
+              <a:defRPr sz="1000" b="0">
+                <a:solidFill>
+                  <a:srgbClr val="666666"/>
+                </a:solidFill>
+                <a:latin typeface="Calibri"/>
+              </a:defRPr>
+            </a:pPr>
+            <a:r>
+              <a:t>learn_legalization — 03 displacement hpwl</a:t>
+            </a:r>
+          </a:p>
+        </p:txBody>
+      </p:sp>
+    </p:spTree>
+  </p:cSld>
+  <p:clrMapOvr>
+    <a:masterClrMapping/>
+  </p:clrMapOvr>
+</p:sld>
+</file>
+
+<file path=ppt/slides/slide13.xml><?xml version="1.0" encoding="utf-8"?>
+<p:sld xmlns:a="http://schemas.openxmlformats.org/drawingml/2006/main" xmlns:p="http://schemas.openxmlformats.org/presentationml/2006/main" xmlns:r="http://schemas.openxmlformats.org/officeDocument/2006/relationships">
+  <p:cSld>
+    <p:spTree>
+      <p:nvGrpSpPr>
+        <p:cNvPr id="1" name=""/>
+        <p:cNvGrpSpPr/>
+        <p:nvPr/>
+      </p:nvGrpSpPr>
+      <p:grpSpPr/>
+      <p:sp>
+        <p:nvSpPr>
+          <p:cNvPr id="2" name="TextBox 1"/>
+          <p:cNvSpPr txBox="1"/>
+          <p:nvPr/>
+        </p:nvSpPr>
+        <p:spPr>
+          <a:xfrm>
+            <a:off x="548640" y="411480"/>
+            <a:ext cx="11064240" cy="777240"/>
+          </a:xfrm>
+          <a:prstGeom prst="rect">
+            <a:avLst/>
+          </a:prstGeom>
+          <a:noFill/>
+        </p:spPr>
+        <p:txBody>
+          <a:bodyPr wrap="square">
+            <a:noAutofit/>
+          </a:bodyPr>
+          <a:lstStyle/>
+          <a:p>
+            <a:pPr>
+              <a:lnSpc>
+                <a:spcPts val="2200"/>
+              </a:lnSpc>
+            </a:pPr>
+            <a:r>
+              <a:rPr sz="2800" b="1">
+                <a:solidFill>
+                  <a:srgbClr val="1A1A2E"/>
+                </a:solidFill>
+                <a:latin typeface="Calibri"/>
+              </a:rPr>
+              <a:t>Pitfalls</a:t>
+            </a:r>
+          </a:p>
+        </p:txBody>
+      </p:sp>
+      <p:sp>
+        <p:nvSpPr>
+          <p:cNvPr id="3" name="TextBox 2"/>
+          <p:cNvSpPr txBox="1"/>
+          <p:nvPr/>
+        </p:nvSpPr>
+        <p:spPr>
+          <a:xfrm>
+            <a:off x="548640" y="1234440"/>
+            <a:ext cx="11064240" cy="4937760"/>
+          </a:xfrm>
+          <a:prstGeom prst="rect">
+            <a:avLst/>
+          </a:prstGeom>
+          <a:noFill/>
+        </p:spPr>
+        <p:txBody>
+          <a:bodyPr wrap="square">
+            <a:noAutofit/>
+          </a:bodyPr>
+          <a:lstStyle/>
+          <a:p>
+            <a:pPr lvl="0" marL="457200" indent="-228600">
+              <a:buFont typeface="Calibri"/>
+              <a:spcAft>
+                <a:spcPts val="1000"/>
+              </a:spcAft>
+              <a:buSzPct val="100000"/>
+              <a:buChar char="•"/>
+              <a:lnSpc>
+                <a:spcPts val="2200"/>
+              </a:lnSpc>
+            </a:pPr>
+            <a:r>
+              <a:rPr sz="2000" b="0">
+                <a:solidFill>
+                  <a:srgbClr val="333333"/>
+                </a:solidFill>
+                <a:latin typeface="Calibri"/>
+              </a:rPr>
+              <a:t>Common traps</a:t>
+            </a:r>
+          </a:p>
+        </p:txBody>
+      </p:sp>
+      <p:sp>
+        <p:nvSpPr>
+          <p:cNvPr id="4" name="TextBox 3"/>
+          <p:cNvSpPr txBox="1"/>
+          <p:nvPr/>
+        </p:nvSpPr>
+        <p:spPr>
+          <a:xfrm>
+            <a:off x="548640" y="6355080"/>
+            <a:ext cx="11064240" cy="320040"/>
+          </a:xfrm>
+          <a:prstGeom prst="rect">
+            <a:avLst/>
+          </a:prstGeom>
+          <a:noFill/>
+        </p:spPr>
+        <p:txBody>
+          <a:bodyPr wrap="square">
+            <a:noAutofit/>
+          </a:bodyPr>
+          <a:lstStyle/>
+          <a:p>
+            <a:pPr algn="r">
+              <a:lnSpc>
+                <a:spcPts val="2200"/>
+              </a:lnSpc>
+              <a:defRPr sz="1000" b="0">
+                <a:solidFill>
+                  <a:srgbClr val="666666"/>
+                </a:solidFill>
+                <a:latin typeface="Calibri"/>
+              </a:defRPr>
+            </a:pPr>
+            <a:r>
+              <a:t>learn_legalization — 03 displacement hpwl</a:t>
+            </a:r>
+          </a:p>
+        </p:txBody>
+      </p:sp>
+    </p:spTree>
+  </p:cSld>
+  <p:clrMapOvr>
+    <a:masterClrMapping/>
+  </p:clrMapOvr>
+</p:sld>
+</file>
+
+<file path=ppt/slides/slide14.xml><?xml version="1.0" encoding="utf-8"?>
+<p:sld xmlns:a="http://schemas.openxmlformats.org/drawingml/2006/main" xmlns:p="http://schemas.openxmlformats.org/presentationml/2006/main" xmlns:r="http://schemas.openxmlformats.org/officeDocument/2006/relationships">
+  <p:cSld>
+    <p:spTree>
+      <p:nvGrpSpPr>
+        <p:cNvPr id="1" name=""/>
+        <p:cNvGrpSpPr/>
+        <p:nvPr/>
+      </p:nvGrpSpPr>
+      <p:grpSpPr/>
+      <p:sp>
+        <p:nvSpPr>
+          <p:cNvPr id="2" name="TextBox 1"/>
+          <p:cNvSpPr txBox="1"/>
+          <p:nvPr/>
+        </p:nvSpPr>
+        <p:spPr>
+          <a:xfrm>
+            <a:off x="548640" y="411480"/>
+            <a:ext cx="11064240" cy="777240"/>
+          </a:xfrm>
+          <a:prstGeom prst="rect">
+            <a:avLst/>
+          </a:prstGeom>
+          <a:noFill/>
+        </p:spPr>
+        <p:txBody>
+          <a:bodyPr wrap="square">
+            <a:noAutofit/>
+          </a:bodyPr>
+          <a:lstStyle/>
+          <a:p>
+            <a:pPr>
+              <a:lnSpc>
+                <a:spcPts val="2200"/>
+              </a:lnSpc>
+            </a:pPr>
+            <a:r>
+              <a:rPr sz="2800" b="1">
+                <a:solidFill>
+                  <a:srgbClr val="1A1A2E"/>
+                </a:solidFill>
+                <a:latin typeface="Calibri"/>
+              </a:rPr>
               <a:t>Your turn</a:t>
             </a:r>
           </a:p>
@@ -4778,6 +5484,125 @@
               <a:t>Higher lambda favors staying near global placement even when wirelength could be slightly</a:t>
             </a:r>
           </a:p>
+        </p:txBody>
+      </p:sp>
+      <p:sp>
+        <p:nvSpPr>
+          <p:cNvPr id="4" name="TextBox 3"/>
+          <p:cNvSpPr txBox="1"/>
+          <p:nvPr/>
+        </p:nvSpPr>
+        <p:spPr>
+          <a:xfrm>
+            <a:off x="548640" y="6355080"/>
+            <a:ext cx="11064240" cy="320040"/>
+          </a:xfrm>
+          <a:prstGeom prst="rect">
+            <a:avLst/>
+          </a:prstGeom>
+          <a:noFill/>
+        </p:spPr>
+        <p:txBody>
+          <a:bodyPr wrap="square">
+            <a:noAutofit/>
+          </a:bodyPr>
+          <a:lstStyle/>
+          <a:p>
+            <a:pPr algn="r">
+              <a:lnSpc>
+                <a:spcPts val="2200"/>
+              </a:lnSpc>
+              <a:defRPr sz="1000" b="0">
+                <a:solidFill>
+                  <a:srgbClr val="666666"/>
+                </a:solidFill>
+                <a:latin typeface="Calibri"/>
+              </a:defRPr>
+            </a:pPr>
+            <a:r>
+              <a:t>learn_legalization — 03 displacement hpwl</a:t>
+            </a:r>
+          </a:p>
+        </p:txBody>
+      </p:sp>
+    </p:spTree>
+  </p:cSld>
+  <p:clrMapOvr>
+    <a:masterClrMapping/>
+  </p:clrMapOvr>
+</p:sld>
+</file>
+
+<file path=ppt/slides/slide3.xml><?xml version="1.0" encoding="utf-8"?>
+<p:sld xmlns:a="http://schemas.openxmlformats.org/drawingml/2006/main" xmlns:p="http://schemas.openxmlformats.org/presentationml/2006/main" xmlns:r="http://schemas.openxmlformats.org/officeDocument/2006/relationships">
+  <p:cSld>
+    <p:spTree>
+      <p:nvGrpSpPr>
+        <p:cNvPr id="1" name=""/>
+        <p:cNvGrpSpPr/>
+        <p:nvPr/>
+      </p:nvGrpSpPr>
+      <p:grpSpPr/>
+      <p:sp>
+        <p:nvSpPr>
+          <p:cNvPr id="2" name="TextBox 1"/>
+          <p:cNvSpPr txBox="1"/>
+          <p:nvPr/>
+        </p:nvSpPr>
+        <p:spPr>
+          <a:xfrm>
+            <a:off x="548640" y="411480"/>
+            <a:ext cx="11064240" cy="777240"/>
+          </a:xfrm>
+          <a:prstGeom prst="rect">
+            <a:avLst/>
+          </a:prstGeom>
+          <a:noFill/>
+        </p:spPr>
+        <p:txBody>
+          <a:bodyPr wrap="square">
+            <a:noAutofit/>
+          </a:bodyPr>
+          <a:lstStyle/>
+          <a:p>
+            <a:pPr>
+              <a:lnSpc>
+                <a:spcPts val="2200"/>
+              </a:lnSpc>
+            </a:pPr>
+            <a:r>
+              <a:rPr sz="2800" b="1">
+                <a:solidFill>
+                  <a:srgbClr val="1A1A2E"/>
+                </a:solidFill>
+                <a:latin typeface="Calibri"/>
+              </a:rPr>
+              <a:t>Pseudocode</a:t>
+            </a:r>
+          </a:p>
+        </p:txBody>
+      </p:sp>
+      <p:sp>
+        <p:nvSpPr>
+          <p:cNvPr id="3" name="TextBox 2"/>
+          <p:cNvSpPr txBox="1"/>
+          <p:nvPr/>
+        </p:nvSpPr>
+        <p:spPr>
+          <a:xfrm>
+            <a:off x="548640" y="1234440"/>
+            <a:ext cx="11064240" cy="4937760"/>
+          </a:xfrm>
+          <a:prstGeom prst="rect">
+            <a:avLst/>
+          </a:prstGeom>
+          <a:noFill/>
+        </p:spPr>
+        <p:txBody>
+          <a:bodyPr wrap="square">
+            <a:noAutofit/>
+          </a:bodyPr>
+          <a:lstStyle/>
           <a:p>
             <a:pPr lvl="0" marL="457200" indent="-228600">
               <a:buFont typeface="Calibri"/>
@@ -4797,7 +5622,73 @@
                 </a:solidFill>
                 <a:latin typeface="Calibri"/>
               </a:rPr>
-              <a:t>&lt;!-- algorithm-walkthrough --&gt;</a:t>
+              <a:t>This module’s pseudocode is a cost function, not a packer</a:t>
+            </a:r>
+          </a:p>
+          <a:p>
+            <a:pPr lvl="0" marL="457200" indent="-228600">
+              <a:buFont typeface="Calibri"/>
+              <a:spcAft>
+                <a:spcPts val="1000"/>
+              </a:spcAft>
+              <a:buSzPct val="100000"/>
+              <a:buChar char="•"/>
+              <a:lnSpc>
+                <a:spcPts val="2200"/>
+              </a:lnSpc>
+            </a:pPr>
+            <a:r>
+              <a:rPr sz="2000" b="0">
+                <a:solidFill>
+                  <a:srgbClr val="333333"/>
+                </a:solidFill>
+                <a:latin typeface="Calibri"/>
+              </a:rPr>
+              <a:t>After you have a legal layout</a:t>
+            </a:r>
+          </a:p>
+          <a:p>
+            <a:pPr lvl="0" marL="457200" indent="-228600">
+              <a:buFont typeface="Calibri"/>
+              <a:spcAft>
+                <a:spcPts val="1000"/>
+              </a:spcAft>
+              <a:buSzPct val="100000"/>
+              <a:buChar char="•"/>
+              <a:lnSpc>
+                <a:spcPts val="2200"/>
+              </a:lnSpc>
+            </a:pPr>
+            <a:r>
+              <a:rPr sz="2000" b="0">
+                <a:solidFill>
+                  <a:srgbClr val="333333"/>
+                </a:solidFill>
+                <a:latin typeface="Calibri"/>
+              </a:rPr>
+              <a:t>Open this module's examples file and find the Pseudocode section</a:t>
+            </a:r>
+          </a:p>
+          <a:p>
+            <a:pPr lvl="0" marL="457200" indent="-228600">
+              <a:buFont typeface="Calibri"/>
+              <a:spcAft>
+                <a:spcPts val="1000"/>
+              </a:spcAft>
+              <a:buSzPct val="100000"/>
+              <a:buChar char="•"/>
+              <a:lnSpc>
+                <a:spcPts val="2200"/>
+              </a:lnSpc>
+            </a:pPr>
+            <a:r>
+              <a:rPr sz="2000" b="0">
+                <a:solidFill>
+                  <a:srgbClr val="333333"/>
+                </a:solidFill>
+                <a:latin typeface="Calibri"/>
+              </a:rPr>
+              <a:t>That written sketch is what you implement on the implement track and what the browser</a:t>
             </a:r>
           </a:p>
         </p:txBody>
@@ -4849,7 +5740,446 @@
 </p:sld>
 </file>
 
-<file path=ppt/slides/slide3.xml><?xml version="1.0" encoding="utf-8"?>
+<file path=ppt/slides/slide4.xml><?xml version="1.0" encoding="utf-8"?>
+<p:sld xmlns:a="http://schemas.openxmlformats.org/drawingml/2006/main" xmlns:p="http://schemas.openxmlformats.org/presentationml/2006/main" xmlns:r="http://schemas.openxmlformats.org/officeDocument/2006/relationships">
+  <p:cSld>
+    <p:spTree>
+      <p:nvGrpSpPr>
+        <p:cNvPr id="1" name=""/>
+        <p:cNvGrpSpPr/>
+        <p:nvPr/>
+      </p:nvGrpSpPr>
+      <p:grpSpPr/>
+      <p:sp>
+        <p:nvSpPr>
+          <p:cNvPr id="2" name="TextBox 1"/>
+          <p:cNvSpPr txBox="1"/>
+          <p:nvPr/>
+        </p:nvSpPr>
+        <p:spPr>
+          <a:xfrm>
+            <a:off x="548640" y="411480"/>
+            <a:ext cx="11064240" cy="777240"/>
+          </a:xfrm>
+          <a:prstGeom prst="rect">
+            <a:avLst/>
+          </a:prstGeom>
+          <a:noFill/>
+        </p:spPr>
+        <p:txBody>
+          <a:bodyPr wrap="square">
+            <a:noAutofit/>
+          </a:bodyPr>
+          <a:lstStyle/>
+          <a:p>
+            <a:pPr>
+              <a:lnSpc>
+                <a:spcPts val="2200"/>
+              </a:lnSpc>
+            </a:pPr>
+            <a:r>
+              <a:rPr sz="2800" b="1">
+                <a:solidFill>
+                  <a:srgbClr val="1A1A2E"/>
+                </a:solidFill>
+                <a:latin typeface="Calibri"/>
+              </a:rPr>
+              <a:t>Algorithm sketch</a:t>
+            </a:r>
+          </a:p>
+        </p:txBody>
+      </p:sp>
+      <p:sp>
+        <p:nvSpPr>
+          <p:cNvPr id="3" name="TextBox 2"/>
+          <p:cNvSpPr txBox="1"/>
+          <p:nvPr/>
+        </p:nvSpPr>
+        <p:spPr>
+          <a:xfrm>
+            <a:off x="548640" y="1234440"/>
+            <a:ext cx="11064240" cy="4937760"/>
+          </a:xfrm>
+          <a:prstGeom prst="rect">
+            <a:avLst/>
+          </a:prstGeom>
+          <a:noFill/>
+        </p:spPr>
+        <p:txBody>
+          <a:bodyPr wrap="square">
+            <a:noAutofit/>
+          </a:bodyPr>
+          <a:lstStyle/>
+          <a:p>
+            <a:pPr lvl="0" marL="457200" indent="-228600">
+              <a:buFont typeface="Calibri"/>
+              <a:spcAft>
+                <a:spcPts val="1000"/>
+              </a:spcAft>
+              <a:buSzPct val="100000"/>
+              <a:buChar char="•"/>
+              <a:lnSpc>
+                <a:spcPts val="2200"/>
+              </a:lnSpc>
+            </a:pPr>
+            <a:r>
+              <a:rPr sz="2000" b="0">
+                <a:solidFill>
+                  <a:srgbClr val="333333"/>
+                </a:solidFill>
+                <a:latin typeface="Calibri"/>
+              </a:rPr>
+              <a:t>Plug in the Abacus goldens: thirty-eight plus lambda times four</a:t>
+            </a:r>
+          </a:p>
+          <a:p>
+            <a:pPr lvl="0" marL="457200" indent="-228600">
+              <a:buFont typeface="Calibri"/>
+              <a:spcAft>
+                <a:spcPts val="1000"/>
+              </a:spcAft>
+              <a:buSzPct val="100000"/>
+              <a:buChar char="•"/>
+              <a:lnSpc>
+                <a:spcPts val="2200"/>
+              </a:lnSpc>
+            </a:pPr>
+            <a:r>
+              <a:rPr sz="2000" b="0">
+                <a:solidFill>
+                  <a:srgbClr val="333333"/>
+                </a:solidFill>
+                <a:latin typeface="Calibri"/>
+              </a:rPr>
+              <a:t>Lambda one costs forty-two; lambda five costs fifty-eight</a:t>
+            </a:r>
+          </a:p>
+          <a:p>
+            <a:pPr lvl="0" marL="457200" indent="-228600">
+              <a:buFont typeface="Calibri"/>
+              <a:spcAft>
+                <a:spcPts val="1000"/>
+              </a:spcAft>
+              <a:buSzPct val="100000"/>
+              <a:buChar char="•"/>
+              <a:lnSpc>
+                <a:spcPts val="2200"/>
+              </a:lnSpc>
+            </a:pPr>
+            <a:r>
+              <a:rPr sz="2000" b="0">
+                <a:solidFill>
+                  <a:srgbClr val="333333"/>
+                </a:solidFill>
+                <a:latin typeface="Calibri"/>
+              </a:rPr>
+              <a:t>Higher lambda means the sketch favors staying near the global place</a:t>
+            </a:r>
+          </a:p>
+        </p:txBody>
+      </p:sp>
+      <p:sp>
+        <p:nvSpPr>
+          <p:cNvPr id="4" name="TextBox 3"/>
+          <p:cNvSpPr txBox="1"/>
+          <p:nvPr/>
+        </p:nvSpPr>
+        <p:spPr>
+          <a:xfrm>
+            <a:off x="548640" y="6355080"/>
+            <a:ext cx="11064240" cy="320040"/>
+          </a:xfrm>
+          <a:prstGeom prst="rect">
+            <a:avLst/>
+          </a:prstGeom>
+          <a:noFill/>
+        </p:spPr>
+        <p:txBody>
+          <a:bodyPr wrap="square">
+            <a:noAutofit/>
+          </a:bodyPr>
+          <a:lstStyle/>
+          <a:p>
+            <a:pPr algn="r">
+              <a:lnSpc>
+                <a:spcPts val="2200"/>
+              </a:lnSpc>
+              <a:defRPr sz="1000" b="0">
+                <a:solidFill>
+                  <a:srgbClr val="666666"/>
+                </a:solidFill>
+                <a:latin typeface="Calibri"/>
+              </a:defRPr>
+            </a:pPr>
+            <a:r>
+              <a:t>learn_legalization — 03 displacement hpwl</a:t>
+            </a:r>
+          </a:p>
+        </p:txBody>
+      </p:sp>
+    </p:spTree>
+  </p:cSld>
+  <p:clrMapOvr>
+    <a:masterClrMapping/>
+  </p:clrMapOvr>
+</p:sld>
+</file>
+
+<file path=ppt/slides/slide5.xml><?xml version="1.0" encoding="utf-8"?>
+<p:sld xmlns:a="http://schemas.openxmlformats.org/drawingml/2006/main" xmlns:p="http://schemas.openxmlformats.org/presentationml/2006/main" xmlns:r="http://schemas.openxmlformats.org/officeDocument/2006/relationships">
+  <p:cSld>
+    <p:spTree>
+      <p:nvGrpSpPr>
+        <p:cNvPr id="1" name=""/>
+        <p:cNvGrpSpPr/>
+        <p:nvPr/>
+      </p:nvGrpSpPr>
+      <p:grpSpPr/>
+      <p:sp>
+        <p:nvSpPr>
+          <p:cNvPr id="2" name="TextBox 1"/>
+          <p:cNvSpPr txBox="1"/>
+          <p:nvPr/>
+        </p:nvSpPr>
+        <p:spPr>
+          <a:xfrm>
+            <a:off x="548640" y="411480"/>
+            <a:ext cx="11064240" cy="777240"/>
+          </a:xfrm>
+          <a:prstGeom prst="rect">
+            <a:avLst/>
+          </a:prstGeom>
+          <a:noFill/>
+        </p:spPr>
+        <p:txBody>
+          <a:bodyPr wrap="square">
+            <a:noAutofit/>
+          </a:bodyPr>
+          <a:lstStyle/>
+          <a:p>
+            <a:pPr>
+              <a:lnSpc>
+                <a:spcPts val="2200"/>
+              </a:lnSpc>
+            </a:pPr>
+            <a:r>
+              <a:rPr sz="2800" b="1">
+                <a:solidFill>
+                  <a:srgbClr val="1A1A2E"/>
+                </a:solidFill>
+                <a:latin typeface="Calibri"/>
+              </a:rPr>
+              <a:t>Algorithm sketch — try these</a:t>
+            </a:r>
+          </a:p>
+        </p:txBody>
+      </p:sp>
+      <p:sp>
+        <p:nvSpPr>
+          <p:cNvPr id="3" name="TextBox 2"/>
+          <p:cNvSpPr txBox="1"/>
+          <p:nvPr/>
+        </p:nvSpPr>
+        <p:spPr>
+          <a:xfrm>
+            <a:off x="548640" y="1143000"/>
+            <a:ext cx="11064240" cy="5029200"/>
+          </a:xfrm>
+          <a:prstGeom prst="rect">
+            <a:avLst/>
+          </a:prstGeom>
+          <a:solidFill>
+            <a:srgbClr val="F4F4F4"/>
+          </a:solidFill>
+        </p:spPr>
+        <p:txBody>
+          <a:bodyPr wrap="square">
+            <a:noAutofit/>
+          </a:bodyPr>
+          <a:lstStyle/>
+          <a:p>
+            <a:pPr>
+              <a:lnSpc>
+                <a:spcPts val="2200"/>
+              </a:lnSpc>
+              <a:spcAft>
+                <a:spcPts val="400"/>
+              </a:spcAft>
+            </a:pPr>
+            <a:r>
+              <a:rPr sz="2000" b="0">
+                <a:solidFill>
+                  <a:srgbClr val="333333"/>
+                </a:solidFill>
+                <a:latin typeface="Consolas"/>
+              </a:rPr>
+              <a:t>INPUT: legal positions, origin, nets, λ≥0</a:t>
+            </a:r>
+          </a:p>
+          <a:p>
+            <a:pPr>
+              <a:lnSpc>
+                <a:spcPts val="2200"/>
+              </a:lnSpc>
+              <a:spcAft>
+                <a:spcPts val="400"/>
+              </a:spcAft>
+            </a:pPr>
+            <a:r>
+              <a:rPr sz="2000" b="0">
+                <a:solidFill>
+                  <a:srgbClr val="333333"/>
+                </a:solidFill>
+                <a:latin typeface="Consolas"/>
+              </a:rPr>
+              <a:t>OUTPUT: cost, HPWL, disp</a:t>
+            </a:r>
+          </a:p>
+          <a:p>
+            <a:pPr>
+              <a:lnSpc>
+                <a:spcPts val="2200"/>
+              </a:lnSpc>
+              <a:spcAft>
+                <a:spcPts val="400"/>
+              </a:spcAft>
+            </a:pPr>
+            <a:r>
+              <a:rPr sz="2000" b="0">
+                <a:solidFill>
+                  <a:srgbClr val="333333"/>
+                </a:solidFill>
+                <a:latin typeface="Consolas"/>
+              </a:rPr>
+              <a:t>disp ← Σ|Δx|+|Δy| vs origin</a:t>
+            </a:r>
+          </a:p>
+          <a:p>
+            <a:pPr>
+              <a:lnSpc>
+                <a:spcPts val="2200"/>
+              </a:lnSpc>
+              <a:spcAft>
+                <a:spcPts val="400"/>
+              </a:spcAft>
+            </a:pPr>
+            <a:r>
+              <a:rPr sz="2000" b="0">
+                <a:solidFill>
+                  <a:srgbClr val="333333"/>
+                </a:solidFill>
+                <a:latin typeface="Consolas"/>
+              </a:rPr>
+              <a:t>HPWL ← Σ net bbox (cell centers)</a:t>
+            </a:r>
+          </a:p>
+          <a:p>
+            <a:pPr>
+              <a:lnSpc>
+                <a:spcPts val="2200"/>
+              </a:lnSpc>
+              <a:spcAft>
+                <a:spcPts val="400"/>
+              </a:spcAft>
+            </a:pPr>
+            <a:r>
+              <a:rPr sz="2000" b="0">
+                <a:solidFill>
+                  <a:srgbClr val="333333"/>
+                </a:solidFill>
+                <a:latin typeface="Consolas"/>
+              </a:rPr>
+              <a:t>cost ← HPWL + λ · disp</a:t>
+            </a:r>
+          </a:p>
+          <a:p>
+            <a:pPr>
+              <a:lnSpc>
+                <a:spcPts val="2200"/>
+              </a:lnSpc>
+              <a:spcAft>
+                <a:spcPts val="400"/>
+              </a:spcAft>
+            </a:pPr>
+            <a:r>
+              <a:rPr sz="2000" b="0">
+                <a:solidFill>
+                  <a:srgbClr val="333333"/>
+                </a:solidFill>
+                <a:latin typeface="Consolas"/>
+              </a:rPr>
+              <a:t>GOLDEN Abacus: HPWL=38 disp=4</a:t>
+            </a:r>
+          </a:p>
+          <a:p>
+            <a:pPr>
+              <a:lnSpc>
+                <a:spcPts val="2200"/>
+              </a:lnSpc>
+              <a:spcAft>
+                <a:spcPts val="400"/>
+              </a:spcAft>
+            </a:pPr>
+            <a:r>
+              <a:rPr sz="2000" b="0">
+                <a:solidFill>
+                  <a:srgbClr val="333333"/>
+                </a:solidFill>
+                <a:latin typeface="Consolas"/>
+              </a:rPr>
+              <a:t>  λ=1 → 42;  λ=5 → 58</a:t>
+            </a:r>
+          </a:p>
+        </p:txBody>
+      </p:sp>
+      <p:sp>
+        <p:nvSpPr>
+          <p:cNvPr id="4" name="TextBox 3"/>
+          <p:cNvSpPr txBox="1"/>
+          <p:nvPr/>
+        </p:nvSpPr>
+        <p:spPr>
+          <a:xfrm>
+            <a:off x="548640" y="6355080"/>
+            <a:ext cx="11064240" cy="320040"/>
+          </a:xfrm>
+          <a:prstGeom prst="rect">
+            <a:avLst/>
+          </a:prstGeom>
+          <a:noFill/>
+        </p:spPr>
+        <p:txBody>
+          <a:bodyPr wrap="square">
+            <a:noAutofit/>
+          </a:bodyPr>
+          <a:lstStyle/>
+          <a:p>
+            <a:pPr algn="r">
+              <a:lnSpc>
+                <a:spcPts val="2200"/>
+              </a:lnSpc>
+              <a:defRPr sz="1000" b="0">
+                <a:solidFill>
+                  <a:srgbClr val="666666"/>
+                </a:solidFill>
+                <a:latin typeface="Calibri"/>
+              </a:defRPr>
+            </a:pPr>
+            <a:r>
+              <a:t>learn_legalization — 03 displacement hpwl</a:t>
+            </a:r>
+          </a:p>
+        </p:txBody>
+      </p:sp>
+    </p:spTree>
+  </p:cSld>
+  <p:clrMapOvr>
+    <a:masterClrMapping/>
+  </p:clrMapOvr>
+</p:sld>
+</file>
+
+<file path=ppt/slides/slide6.xml><?xml version="1.0" encoding="utf-8"?>
 <p:sld xmlns:a="http://schemas.openxmlformats.org/drawingml/2006/main" xmlns:p="http://schemas.openxmlformats.org/presentationml/2006/main" xmlns:r="http://schemas.openxmlformats.org/officeDocument/2006/relationships">
   <p:cSld>
     <p:spTree>
@@ -5008,7 +6338,7 @@
 </p:sld>
 </file>
 
-<file path=ppt/slides/slide4.xml><?xml version="1.0" encoding="utf-8"?>
+<file path=ppt/slides/slide7.xml><?xml version="1.0" encoding="utf-8"?>
 <p:sld xmlns:a="http://schemas.openxmlformats.org/drawingml/2006/main" xmlns:p="http://schemas.openxmlformats.org/presentationml/2006/main" xmlns:r="http://schemas.openxmlformats.org/officeDocument/2006/relationships">
   <p:cSld>
     <p:spTree>
@@ -5167,7 +6497,7 @@
 </p:sld>
 </file>
 
-<file path=ppt/slides/slide5.xml><?xml version="1.0" encoding="utf-8"?>
+<file path=ppt/slides/slide8.xml><?xml version="1.0" encoding="utf-8"?>
 <p:sld xmlns:a="http://schemas.openxmlformats.org/drawingml/2006/main" xmlns:p="http://schemas.openxmlformats.org/presentationml/2006/main" xmlns:r="http://schemas.openxmlformats.org/officeDocument/2006/relationships">
   <p:cSld>
     <p:spTree>
@@ -5326,7 +6656,7 @@
 </p:sld>
 </file>
 
-<file path=ppt/slides/slide6.xml><?xml version="1.0" encoding="utf-8"?>
+<file path=ppt/slides/slide9.xml><?xml version="1.0" encoding="utf-8"?>
 <p:sld xmlns:a="http://schemas.openxmlformats.org/drawingml/2006/main" xmlns:p="http://schemas.openxmlformats.org/presentationml/2006/main" xmlns:r="http://schemas.openxmlformats.org/officeDocument/2006/relationships">
   <p:cSld>
     <p:spTree>
@@ -5441,553 +6771,6 @@
       <p:sp>
         <p:nvSpPr>
           <p:cNvPr id="5" name="TextBox 4"/>
-          <p:cNvSpPr txBox="1"/>
-          <p:nvPr/>
-        </p:nvSpPr>
-        <p:spPr>
-          <a:xfrm>
-            <a:off x="548640" y="6355080"/>
-            <a:ext cx="11064240" cy="320040"/>
-          </a:xfrm>
-          <a:prstGeom prst="rect">
-            <a:avLst/>
-          </a:prstGeom>
-          <a:noFill/>
-        </p:spPr>
-        <p:txBody>
-          <a:bodyPr wrap="square">
-            <a:noAutofit/>
-          </a:bodyPr>
-          <a:lstStyle/>
-          <a:p>
-            <a:pPr algn="r">
-              <a:lnSpc>
-                <a:spcPts val="2200"/>
-              </a:lnSpc>
-              <a:defRPr sz="1000" b="0">
-                <a:solidFill>
-                  <a:srgbClr val="666666"/>
-                </a:solidFill>
-                <a:latin typeface="Calibri"/>
-              </a:defRPr>
-            </a:pPr>
-            <a:r>
-              <a:t>learn_legalization — 03 displacement hpwl</a:t>
-            </a:r>
-          </a:p>
-        </p:txBody>
-      </p:sp>
-    </p:spTree>
-  </p:cSld>
-  <p:clrMapOvr>
-    <a:masterClrMapping/>
-  </p:clrMapOvr>
-</p:sld>
-</file>
-
-<file path=ppt/slides/slide7.xml><?xml version="1.0" encoding="utf-8"?>
-<p:sld xmlns:a="http://schemas.openxmlformats.org/drawingml/2006/main" xmlns:p="http://schemas.openxmlformats.org/presentationml/2006/main" xmlns:r="http://schemas.openxmlformats.org/officeDocument/2006/relationships">
-  <p:cSld>
-    <p:spTree>
-      <p:nvGrpSpPr>
-        <p:cNvPr id="1" name=""/>
-        <p:cNvGrpSpPr/>
-        <p:nvPr/>
-      </p:nvGrpSpPr>
-      <p:grpSpPr/>
-      <p:sp>
-        <p:nvSpPr>
-          <p:cNvPr id="2" name="TextBox 1"/>
-          <p:cNvSpPr txBox="1"/>
-          <p:nvPr/>
-        </p:nvSpPr>
-        <p:spPr>
-          <a:xfrm>
-            <a:off x="548640" y="411480"/>
-            <a:ext cx="11064240" cy="777240"/>
-          </a:xfrm>
-          <a:prstGeom prst="rect">
-            <a:avLst/>
-          </a:prstGeom>
-          <a:noFill/>
-        </p:spPr>
-        <p:txBody>
-          <a:bodyPr wrap="square">
-            <a:noAutofit/>
-          </a:bodyPr>
-          <a:lstStyle/>
-          <a:p>
-            <a:pPr>
-              <a:lnSpc>
-                <a:spcPts val="2200"/>
-              </a:lnSpc>
-            </a:pPr>
-            <a:r>
-              <a:rPr sz="2800" b="1">
-                <a:solidFill>
-                  <a:srgbClr val="1A1A2E"/>
-                </a:solidFill>
-                <a:latin typeface="Calibri"/>
-              </a:rPr>
-              <a:t>Higher λ favors staying put</a:t>
-            </a:r>
-          </a:p>
-        </p:txBody>
-      </p:sp>
-      <p:pic>
-        <p:nvPicPr>
-          <p:cNvPr id="3" name="Picture 2" descr="05-lambda-tradeoff.png"/>
-          <p:cNvPicPr>
-            <a:picLocks noChangeAspect="1"/>
-          </p:cNvPicPr>
-          <p:nvPr/>
-        </p:nvPicPr>
-        <p:blipFill>
-          <a:blip r:embed="rId2"/>
-          <a:stretch>
-            <a:fillRect/>
-          </a:stretch>
-        </p:blipFill>
-        <p:spPr>
-          <a:xfrm>
-            <a:off x="548640" y="1143000"/>
-            <a:ext cx="9222489" cy="4572000"/>
-          </a:xfrm>
-          <a:prstGeom prst="rect">
-            <a:avLst/>
-          </a:prstGeom>
-        </p:spPr>
-      </p:pic>
-      <p:sp>
-        <p:nvSpPr>
-          <p:cNvPr id="4" name="TextBox 3"/>
-          <p:cNvSpPr txBox="1"/>
-          <p:nvPr/>
-        </p:nvSpPr>
-        <p:spPr>
-          <a:xfrm>
-            <a:off x="548640" y="5897880"/>
-            <a:ext cx="11064240" cy="411480"/>
-          </a:xfrm>
-          <a:prstGeom prst="rect">
-            <a:avLst/>
-          </a:prstGeom>
-          <a:noFill/>
-        </p:spPr>
-        <p:txBody>
-          <a:bodyPr wrap="square">
-            <a:noAutofit/>
-          </a:bodyPr>
-          <a:lstStyle/>
-          <a:p>
-            <a:pPr>
-              <a:lnSpc>
-                <a:spcPts val="2200"/>
-              </a:lnSpc>
-            </a:pPr>
-            <a:r>
-              <a:rPr sz="1200" b="0">
-                <a:solidFill>
-                  <a:srgbClr val="333333"/>
-                </a:solidFill>
-                <a:latin typeface="Calibri"/>
-              </a:rPr>
-              <a:t>Higher λ favors staying put</a:t>
-            </a:r>
-          </a:p>
-        </p:txBody>
-      </p:sp>
-      <p:sp>
-        <p:nvSpPr>
-          <p:cNvPr id="5" name="TextBox 4"/>
-          <p:cNvSpPr txBox="1"/>
-          <p:nvPr/>
-        </p:nvSpPr>
-        <p:spPr>
-          <a:xfrm>
-            <a:off x="548640" y="6355080"/>
-            <a:ext cx="11064240" cy="320040"/>
-          </a:xfrm>
-          <a:prstGeom prst="rect">
-            <a:avLst/>
-          </a:prstGeom>
-          <a:noFill/>
-        </p:spPr>
-        <p:txBody>
-          <a:bodyPr wrap="square">
-            <a:noAutofit/>
-          </a:bodyPr>
-          <a:lstStyle/>
-          <a:p>
-            <a:pPr algn="r">
-              <a:lnSpc>
-                <a:spcPts val="2200"/>
-              </a:lnSpc>
-              <a:defRPr sz="1000" b="0">
-                <a:solidFill>
-                  <a:srgbClr val="666666"/>
-                </a:solidFill>
-                <a:latin typeface="Calibri"/>
-              </a:defRPr>
-            </a:pPr>
-            <a:r>
-              <a:t>learn_legalization — 03 displacement hpwl</a:t>
-            </a:r>
-          </a:p>
-        </p:txBody>
-      </p:sp>
-    </p:spTree>
-  </p:cSld>
-  <p:clrMapOvr>
-    <a:masterClrMapping/>
-  </p:clrMapOvr>
-</p:sld>
-</file>
-
-<file path=ppt/slides/slide8.xml><?xml version="1.0" encoding="utf-8"?>
-<p:sld xmlns:a="http://schemas.openxmlformats.org/drawingml/2006/main" xmlns:p="http://schemas.openxmlformats.org/presentationml/2006/main" xmlns:r="http://schemas.openxmlformats.org/officeDocument/2006/relationships">
-  <p:cSld>
-    <p:spTree>
-      <p:nvGrpSpPr>
-        <p:cNvPr id="1" name=""/>
-        <p:cNvGrpSpPr/>
-        <p:nvPr/>
-      </p:nvGrpSpPr>
-      <p:grpSpPr/>
-      <p:sp>
-        <p:nvSpPr>
-          <p:cNvPr id="2" name="TextBox 1"/>
-          <p:cNvSpPr txBox="1"/>
-          <p:nvPr/>
-        </p:nvSpPr>
-        <p:spPr>
-          <a:xfrm>
-            <a:off x="548640" y="411480"/>
-            <a:ext cx="11064240" cy="777240"/>
-          </a:xfrm>
-          <a:prstGeom prst="rect">
-            <a:avLst/>
-          </a:prstGeom>
-          <a:noFill/>
-        </p:spPr>
-        <p:txBody>
-          <a:bodyPr wrap="square">
-            <a:noAutofit/>
-          </a:bodyPr>
-          <a:lstStyle/>
-          <a:p>
-            <a:pPr>
-              <a:lnSpc>
-                <a:spcPts val="2200"/>
-              </a:lnSpc>
-            </a:pPr>
-            <a:r>
-              <a:rPr sz="2800" b="1">
-                <a:solidFill>
-                  <a:srgbClr val="1A1A2E"/>
-                </a:solidFill>
-                <a:latin typeface="Calibri"/>
-              </a:rPr>
-              <a:t>Browser lab track</a:t>
-            </a:r>
-          </a:p>
-        </p:txBody>
-      </p:sp>
-      <p:sp>
-        <p:nvSpPr>
-          <p:cNvPr id="3" name="TextBox 2"/>
-          <p:cNvSpPr txBox="1"/>
-          <p:nvPr/>
-        </p:nvSpPr>
-        <p:spPr>
-          <a:xfrm>
-            <a:off x="548640" y="1234440"/>
-            <a:ext cx="11064240" cy="4937760"/>
-          </a:xfrm>
-          <a:prstGeom prst="rect">
-            <a:avLst/>
-          </a:prstGeom>
-          <a:noFill/>
-        </p:spPr>
-        <p:txBody>
-          <a:bodyPr wrap="square">
-            <a:noAutofit/>
-          </a:bodyPr>
-          <a:lstStyle/>
-          <a:p>
-            <a:pPr lvl="0" marL="457200" indent="-228600">
-              <a:buFont typeface="Calibri"/>
-              <a:spcAft>
-                <a:spcPts val="1000"/>
-              </a:spcAft>
-              <a:buSzPct val="100000"/>
-              <a:buChar char="•"/>
-              <a:lnSpc>
-                <a:spcPts val="2200"/>
-              </a:lnSpc>
-            </a:pPr>
-            <a:r>
-              <a:rPr sz="2000" b="0">
-                <a:solidFill>
-                  <a:srgbClr val="333333"/>
-                </a:solidFill>
-                <a:latin typeface="Calibri"/>
-              </a:rPr>
-              <a:t>In the browser lab track, open the </a:t>
-            </a:r>
-            <a:r>
-              <a:rPr sz="2000" b="1">
-                <a:solidFill>
-                  <a:srgbClr val="333333"/>
-                </a:solidFill>
-                <a:latin typeface="Calibri"/>
-              </a:rPr>
-              <a:t>displacement-hpwl</a:t>
-            </a:r>
-            <a:r>
-              <a:rPr sz="2000" b="0">
-                <a:solidFill>
-                  <a:srgbClr val="333333"/>
-                </a:solidFill>
-                <a:latin typeface="Calibri"/>
-              </a:rPr>
-              <a:t> lab from the tools shelf</a:t>
-            </a:r>
-          </a:p>
-          <a:p>
-            <a:pPr lvl="0" marL="457200" indent="-228600">
-              <a:buFont typeface="Calibri"/>
-              <a:spcAft>
-                <a:spcPts val="1000"/>
-              </a:spcAft>
-              <a:buSzPct val="100000"/>
-              <a:buChar char="•"/>
-              <a:lnSpc>
-                <a:spcPts val="2200"/>
-              </a:lnSpc>
-            </a:pPr>
-            <a:r>
-              <a:rPr sz="2000" b="0">
-                <a:solidFill>
-                  <a:srgbClr val="333333"/>
-                </a:solidFill>
-                <a:latin typeface="Calibri"/>
-              </a:rPr>
-              <a:t>Load the overlap or float starter, run the legalizer once</a:t>
-            </a:r>
-          </a:p>
-          <a:p>
-            <a:pPr lvl="0" marL="457200" indent="-228600">
-              <a:buFont typeface="Calibri"/>
-              <a:spcAft>
-                <a:spcPts val="1000"/>
-              </a:spcAft>
-              <a:buSzPct val="100000"/>
-              <a:buChar char="•"/>
-              <a:lnSpc>
-                <a:spcPts val="2200"/>
-              </a:lnSpc>
-            </a:pPr>
-            <a:r>
-              <a:rPr sz="2000" b="0">
-                <a:solidFill>
-                  <a:srgbClr val="333333"/>
-                </a:solidFill>
-                <a:latin typeface="Calibri"/>
-              </a:rPr>
-              <a:t>Work the challenges that lock the goldens</a:t>
-            </a:r>
-          </a:p>
-        </p:txBody>
-      </p:sp>
-      <p:sp>
-        <p:nvSpPr>
-          <p:cNvPr id="4" name="TextBox 3"/>
-          <p:cNvSpPr txBox="1"/>
-          <p:nvPr/>
-        </p:nvSpPr>
-        <p:spPr>
-          <a:xfrm>
-            <a:off x="548640" y="6355080"/>
-            <a:ext cx="11064240" cy="320040"/>
-          </a:xfrm>
-          <a:prstGeom prst="rect">
-            <a:avLst/>
-          </a:prstGeom>
-          <a:noFill/>
-        </p:spPr>
-        <p:txBody>
-          <a:bodyPr wrap="square">
-            <a:noAutofit/>
-          </a:bodyPr>
-          <a:lstStyle/>
-          <a:p>
-            <a:pPr algn="r">
-              <a:lnSpc>
-                <a:spcPts val="2200"/>
-              </a:lnSpc>
-              <a:defRPr sz="1000" b="0">
-                <a:solidFill>
-                  <a:srgbClr val="666666"/>
-                </a:solidFill>
-                <a:latin typeface="Calibri"/>
-              </a:defRPr>
-            </a:pPr>
-            <a:r>
-              <a:t>learn_legalization — 03 displacement hpwl</a:t>
-            </a:r>
-          </a:p>
-        </p:txBody>
-      </p:sp>
-    </p:spTree>
-  </p:cSld>
-  <p:clrMapOvr>
-    <a:masterClrMapping/>
-  </p:clrMapOvr>
-</p:sld>
-</file>
-
-<file path=ppt/slides/slide9.xml><?xml version="1.0" encoding="utf-8"?>
-<p:sld xmlns:a="http://schemas.openxmlformats.org/drawingml/2006/main" xmlns:p="http://schemas.openxmlformats.org/presentationml/2006/main" xmlns:r="http://schemas.openxmlformats.org/officeDocument/2006/relationships">
-  <p:cSld>
-    <p:spTree>
-      <p:nvGrpSpPr>
-        <p:cNvPr id="1" name=""/>
-        <p:cNvGrpSpPr/>
-        <p:nvPr/>
-      </p:nvGrpSpPr>
-      <p:grpSpPr/>
-      <p:sp>
-        <p:nvSpPr>
-          <p:cNvPr id="2" name="TextBox 1"/>
-          <p:cNvSpPr txBox="1"/>
-          <p:nvPr/>
-        </p:nvSpPr>
-        <p:spPr>
-          <a:xfrm>
-            <a:off x="548640" y="411480"/>
-            <a:ext cx="11064240" cy="777240"/>
-          </a:xfrm>
-          <a:prstGeom prst="rect">
-            <a:avLst/>
-          </a:prstGeom>
-          <a:noFill/>
-        </p:spPr>
-        <p:txBody>
-          <a:bodyPr wrap="square">
-            <a:noAutofit/>
-          </a:bodyPr>
-          <a:lstStyle/>
-          <a:p>
-            <a:pPr>
-              <a:lnSpc>
-                <a:spcPts val="2200"/>
-              </a:lnSpc>
-            </a:pPr>
-            <a:r>
-              <a:rPr sz="2800" b="1">
-                <a:solidFill>
-                  <a:srgbClr val="1A1A2E"/>
-                </a:solidFill>
-                <a:latin typeface="Calibri"/>
-              </a:rPr>
-              <a:t>Implement track</a:t>
-            </a:r>
-          </a:p>
-        </p:txBody>
-      </p:sp>
-      <p:sp>
-        <p:nvSpPr>
-          <p:cNvPr id="3" name="TextBox 2"/>
-          <p:cNvSpPr txBox="1"/>
-          <p:nvPr/>
-        </p:nvSpPr>
-        <p:spPr>
-          <a:xfrm>
-            <a:off x="548640" y="1234440"/>
-            <a:ext cx="11064240" cy="4937760"/>
-          </a:xfrm>
-          <a:prstGeom prst="rect">
-            <a:avLst/>
-          </a:prstGeom>
-          <a:noFill/>
-        </p:spPr>
-        <p:txBody>
-          <a:bodyPr wrap="square">
-            <a:noAutofit/>
-          </a:bodyPr>
-          <a:lstStyle/>
-          <a:p>
-            <a:pPr lvl="0" marL="457200" indent="-228600">
-              <a:buFont typeface="Calibri"/>
-              <a:spcAft>
-                <a:spcPts val="1000"/>
-              </a:spcAft>
-              <a:buSzPct val="100000"/>
-              <a:buChar char="•"/>
-              <a:lnSpc>
-                <a:spcPts val="2200"/>
-              </a:lnSpc>
-            </a:pPr>
-            <a:r>
-              <a:rPr sz="2000" b="0">
-                <a:solidFill>
-                  <a:srgbClr val="333333"/>
-                </a:solidFill>
-                <a:latin typeface="Calibri"/>
-              </a:rPr>
-              <a:t>In the implement track, open this module's examples and the course `common/` solvers</a:t>
-            </a:r>
-          </a:p>
-          <a:p>
-            <a:pPr lvl="0" marL="457200" indent="-228600">
-              <a:buFont typeface="Calibri"/>
-              <a:spcAft>
-                <a:spcPts val="1000"/>
-              </a:spcAft>
-              <a:buSzPct val="100000"/>
-              <a:buChar char="•"/>
-              <a:lnSpc>
-                <a:spcPts val="2200"/>
-              </a:lnSpc>
-            </a:pPr>
-            <a:r>
-              <a:rPr sz="2000" b="0">
-                <a:solidFill>
-                  <a:srgbClr val="333333"/>
-                </a:solidFill>
-                <a:latin typeface="Calibri"/>
-              </a:rPr>
-              <a:t>Parse `tiny_legal.json`, run the algorithm with deterministic coordinates</a:t>
-            </a:r>
-          </a:p>
-          <a:p>
-            <a:pPr lvl="0" marL="457200" indent="-228600">
-              <a:buFont typeface="Calibri"/>
-              <a:spcAft>
-                <a:spcPts val="1000"/>
-              </a:spcAft>
-              <a:buSzPct val="100000"/>
-              <a:buChar char="•"/>
-              <a:lnSpc>
-                <a:spcPts val="2200"/>
-              </a:lnSpc>
-            </a:pPr>
-            <a:r>
-              <a:rPr sz="2000" b="0">
-                <a:solidFill>
-                  <a:srgbClr val="333333"/>
-                </a:solidFill>
-                <a:latin typeface="Calibri"/>
-              </a:rPr>
-              <a:t>Match the browser goldens before you claim the checklist</a:t>
-            </a:r>
-          </a:p>
-        </p:txBody>
-      </p:sp>
-      <p:sp>
-        <p:nvSpPr>
-          <p:cNvPr id="4" name="TextBox 3"/>
           <p:cNvSpPr txBox="1"/>
           <p:nvPr/>
         </p:nvSpPr>
